--- a/scripts/reads-ppt/output/anthropic-81k-economics-fy27ie.pptx
+++ b/scripts/reads-ppt/output/anthropic-81k-economics-fy27ie.pptx
@@ -3264,7 +3264,7 @@
         <p:spPr>
           <a:xfrm>
             <a:off x="457200" y="1444752"/>
-            <a:ext cx="11247120" cy="292608"/>
+            <a:ext cx="11247120" cy="502920"/>
           </a:xfrm>
           <a:prstGeom prst="rect">
             <a:avLst/>
@@ -3277,7 +3277,11 @@
           </a:bodyPr>
           <a:lstStyle/>
           <a:p>
-            <a:pPr algn="l"/>
+            <a:pPr algn="l">
+              <a:lnSpc>
+                <a:spcPct val="120000"/>
+              </a:lnSpc>
+            </a:pPr>
             <a:r>
               <a:rPr sz="1150" b="0" i="1">
                 <a:solidFill>
@@ -3403,7 +3407,7 @@
         </p:nvSpPr>
         <p:spPr>
           <a:xfrm>
-            <a:off x="457200" y="1874519"/>
+            <a:off x="457200" y="2057400"/>
             <a:ext cx="10972800" cy="256032"/>
           </a:xfrm>
           <a:prstGeom prst="rect">
@@ -3438,8 +3442,8 @@
         </p:nvSpPr>
         <p:spPr>
           <a:xfrm>
-            <a:off x="457200" y="3291840"/>
-            <a:ext cx="2695879" cy="2377440"/>
+            <a:off x="457200" y="3246120"/>
+            <a:ext cx="2695879" cy="2606040"/>
           </a:xfrm>
           <a:prstGeom prst="rect">
             <a:avLst/>
@@ -3483,7 +3487,7 @@
         </p:nvSpPr>
         <p:spPr>
           <a:xfrm>
-            <a:off x="457200" y="3291840"/>
+            <a:off x="457200" y="3246120"/>
             <a:ext cx="2695879" cy="36576"/>
           </a:xfrm>
           <a:prstGeom prst="rect">
@@ -3528,8 +3532,8 @@
         </p:nvSpPr>
         <p:spPr>
           <a:xfrm>
-            <a:off x="457200" y="3611880"/>
-            <a:ext cx="2695879" cy="868680"/>
+            <a:off x="548640" y="3566160"/>
+            <a:ext cx="2512999" cy="1051560"/>
           </a:xfrm>
           <a:prstGeom prst="rect">
             <a:avLst/>
@@ -3542,7 +3546,11 @@
           </a:bodyPr>
           <a:lstStyle/>
           <a:p>
-            <a:pPr algn="ctr"/>
+            <a:pPr algn="ctr">
+              <a:lnSpc>
+                <a:spcPct val="110000"/>
+              </a:lnSpc>
+            </a:pPr>
             <a:r>
               <a:rPr sz="3600" b="1" i="0">
                 <a:solidFill>
@@ -3563,7 +3571,7 @@
         </p:nvSpPr>
         <p:spPr>
           <a:xfrm>
-            <a:off x="1530819" y="4709160"/>
+            <a:off x="1530819" y="4800600"/>
             <a:ext cx="548640" cy="22860"/>
           </a:xfrm>
           <a:prstGeom prst="rect">
@@ -3608,8 +3616,8 @@
         </p:nvSpPr>
         <p:spPr>
           <a:xfrm>
-            <a:off x="594360" y="4892040"/>
-            <a:ext cx="2421559" cy="685800"/>
+            <a:off x="594360" y="4937760"/>
+            <a:ext cx="2421559" cy="822960"/>
           </a:xfrm>
           <a:prstGeom prst="rect">
             <a:avLst/>
@@ -3622,7 +3630,11 @@
           </a:bodyPr>
           <a:lstStyle/>
           <a:p>
-            <a:pPr algn="ctr"/>
+            <a:pPr algn="ctr">
+              <a:lnSpc>
+                <a:spcPct val="120000"/>
+              </a:lnSpc>
+            </a:pPr>
             <a:r>
               <a:rPr sz="1100" b="0" i="1">
                 <a:solidFill>
@@ -3643,8 +3655,8 @@
         </p:nvSpPr>
         <p:spPr>
           <a:xfrm>
-            <a:off x="3317671" y="3291840"/>
-            <a:ext cx="2695879" cy="2377440"/>
+            <a:off x="3317671" y="3246120"/>
+            <a:ext cx="2695879" cy="2606040"/>
           </a:xfrm>
           <a:prstGeom prst="rect">
             <a:avLst/>
@@ -3688,7 +3700,7 @@
         </p:nvSpPr>
         <p:spPr>
           <a:xfrm>
-            <a:off x="3317671" y="3291840"/>
+            <a:off x="3317671" y="3246120"/>
             <a:ext cx="2695879" cy="36576"/>
           </a:xfrm>
           <a:prstGeom prst="rect">
@@ -3733,8 +3745,8 @@
         </p:nvSpPr>
         <p:spPr>
           <a:xfrm>
-            <a:off x="3317671" y="3611880"/>
-            <a:ext cx="2695879" cy="868680"/>
+            <a:off x="3409111" y="3566160"/>
+            <a:ext cx="2512999" cy="1051560"/>
           </a:xfrm>
           <a:prstGeom prst="rect">
             <a:avLst/>
@@ -3747,7 +3759,11 @@
           </a:bodyPr>
           <a:lstStyle/>
           <a:p>
-            <a:pPr algn="ctr"/>
+            <a:pPr algn="ctr">
+              <a:lnSpc>
+                <a:spcPct val="110000"/>
+              </a:lnSpc>
+            </a:pPr>
             <a:r>
               <a:rPr sz="3600" b="1" i="0">
                 <a:solidFill>
@@ -3768,7 +3784,7 @@
         </p:nvSpPr>
         <p:spPr>
           <a:xfrm>
-            <a:off x="4391291" y="4709160"/>
+            <a:off x="4391291" y="4800600"/>
             <a:ext cx="548640" cy="22860"/>
           </a:xfrm>
           <a:prstGeom prst="rect">
@@ -3813,8 +3829,8 @@
         </p:nvSpPr>
         <p:spPr>
           <a:xfrm>
-            <a:off x="3454831" y="4892040"/>
-            <a:ext cx="2421559" cy="685800"/>
+            <a:off x="3454831" y="4937760"/>
+            <a:ext cx="2421559" cy="822960"/>
           </a:xfrm>
           <a:prstGeom prst="rect">
             <a:avLst/>
@@ -3827,7 +3843,11 @@
           </a:bodyPr>
           <a:lstStyle/>
           <a:p>
-            <a:pPr algn="ctr"/>
+            <a:pPr algn="ctr">
+              <a:lnSpc>
+                <a:spcPct val="120000"/>
+              </a:lnSpc>
+            </a:pPr>
             <a:r>
               <a:rPr sz="1100" b="0" i="1">
                 <a:solidFill>
@@ -3848,8 +3868,8 @@
         </p:nvSpPr>
         <p:spPr>
           <a:xfrm>
-            <a:off x="6178143" y="3291840"/>
-            <a:ext cx="2695879" cy="2377440"/>
+            <a:off x="6178143" y="3246120"/>
+            <a:ext cx="2695879" cy="2606040"/>
           </a:xfrm>
           <a:prstGeom prst="rect">
             <a:avLst/>
@@ -3893,7 +3913,7 @@
         </p:nvSpPr>
         <p:spPr>
           <a:xfrm>
-            <a:off x="6178143" y="3291840"/>
+            <a:off x="6178143" y="3246120"/>
             <a:ext cx="2695879" cy="36576"/>
           </a:xfrm>
           <a:prstGeom prst="rect">
@@ -3938,8 +3958,8 @@
         </p:nvSpPr>
         <p:spPr>
           <a:xfrm>
-            <a:off x="6178143" y="3611880"/>
-            <a:ext cx="2695879" cy="868680"/>
+            <a:off x="6269583" y="3566160"/>
+            <a:ext cx="2512999" cy="1051560"/>
           </a:xfrm>
           <a:prstGeom prst="rect">
             <a:avLst/>
@@ -3952,7 +3972,11 @@
           </a:bodyPr>
           <a:lstStyle/>
           <a:p>
-            <a:pPr algn="ctr"/>
+            <a:pPr algn="ctr">
+              <a:lnSpc>
+                <a:spcPct val="110000"/>
+              </a:lnSpc>
+            </a:pPr>
             <a:r>
               <a:rPr sz="3600" b="1" i="0">
                 <a:solidFill>
@@ -3973,7 +3997,7 @@
         </p:nvSpPr>
         <p:spPr>
           <a:xfrm>
-            <a:off x="7251763" y="4709160"/>
+            <a:off x="7251763" y="4800600"/>
             <a:ext cx="548640" cy="22860"/>
           </a:xfrm>
           <a:prstGeom prst="rect">
@@ -4018,8 +4042,8 @@
         </p:nvSpPr>
         <p:spPr>
           <a:xfrm>
-            <a:off x="6315303" y="4892040"/>
-            <a:ext cx="2421559" cy="685800"/>
+            <a:off x="6315303" y="4937760"/>
+            <a:ext cx="2421559" cy="822960"/>
           </a:xfrm>
           <a:prstGeom prst="rect">
             <a:avLst/>
@@ -4032,7 +4056,11 @@
           </a:bodyPr>
           <a:lstStyle/>
           <a:p>
-            <a:pPr algn="ctr"/>
+            <a:pPr algn="ctr">
+              <a:lnSpc>
+                <a:spcPct val="120000"/>
+              </a:lnSpc>
+            </a:pPr>
             <a:r>
               <a:rPr sz="1100" b="0" i="1">
                 <a:solidFill>
@@ -4053,8 +4081,8 @@
         </p:nvSpPr>
         <p:spPr>
           <a:xfrm>
-            <a:off x="9038615" y="3291840"/>
-            <a:ext cx="2695879" cy="2377440"/>
+            <a:off x="9038615" y="3246120"/>
+            <a:ext cx="2695879" cy="2606040"/>
           </a:xfrm>
           <a:prstGeom prst="rect">
             <a:avLst/>
@@ -4098,7 +4126,7 @@
         </p:nvSpPr>
         <p:spPr>
           <a:xfrm>
-            <a:off x="9038615" y="3291840"/>
+            <a:off x="9038615" y="3246120"/>
             <a:ext cx="2695879" cy="36576"/>
           </a:xfrm>
           <a:prstGeom prst="rect">
@@ -4143,8 +4171,8 @@
         </p:nvSpPr>
         <p:spPr>
           <a:xfrm>
-            <a:off x="9038615" y="3611880"/>
-            <a:ext cx="2695879" cy="868680"/>
+            <a:off x="9130055" y="3566160"/>
+            <a:ext cx="2512999" cy="1051560"/>
           </a:xfrm>
           <a:prstGeom prst="rect">
             <a:avLst/>
@@ -4157,9 +4185,13 @@
           </a:bodyPr>
           <a:lstStyle/>
           <a:p>
-            <a:pPr algn="ctr"/>
-            <a:r>
-              <a:rPr sz="2000" b="1" i="0">
+            <a:pPr algn="ctr">
+              <a:lnSpc>
+                <a:spcPct val="110000"/>
+              </a:lnSpc>
+            </a:pPr>
+            <a:r>
+              <a:rPr sz="1600" b="1" i="0">
                 <a:solidFill>
                   <a:srgbClr val="460073"/>
                 </a:solidFill>
@@ -4178,7 +4210,7 @@
         </p:nvSpPr>
         <p:spPr>
           <a:xfrm>
-            <a:off x="10112235" y="4709160"/>
+            <a:off x="10112235" y="4800600"/>
             <a:ext cx="548640" cy="22860"/>
           </a:xfrm>
           <a:prstGeom prst="rect">
@@ -4223,8 +4255,8 @@
         </p:nvSpPr>
         <p:spPr>
           <a:xfrm>
-            <a:off x="9175775" y="4892040"/>
-            <a:ext cx="2421559" cy="685800"/>
+            <a:off x="9175775" y="4937760"/>
+            <a:ext cx="2421559" cy="822960"/>
           </a:xfrm>
           <a:prstGeom prst="rect">
             <a:avLst/>
@@ -4237,7 +4269,11 @@
           </a:bodyPr>
           <a:lstStyle/>
           <a:p>
-            <a:pPr algn="ctr"/>
+            <a:pPr algn="ctr">
+              <a:lnSpc>
+                <a:spcPct val="120000"/>
+              </a:lnSpc>
+            </a:pPr>
             <a:r>
               <a:rPr sz="1100" b="0" i="1">
                 <a:solidFill>
@@ -4427,7 +4463,7 @@
         <p:spPr>
           <a:xfrm>
             <a:off x="457200" y="1444752"/>
-            <a:ext cx="11247120" cy="292608"/>
+            <a:ext cx="11247120" cy="502920"/>
           </a:xfrm>
           <a:prstGeom prst="rect">
             <a:avLst/>
@@ -4440,7 +4476,11 @@
           </a:bodyPr>
           <a:lstStyle/>
           <a:p>
-            <a:pPr algn="l"/>
+            <a:pPr algn="l">
+              <a:lnSpc>
+                <a:spcPct val="120000"/>
+              </a:lnSpc>
+            </a:pPr>
             <a:r>
               <a:rPr sz="1150" b="0" i="1">
                 <a:solidFill>
@@ -5599,7 +5639,7 @@
         <p:spPr>
           <a:xfrm>
             <a:off x="457200" y="1444752"/>
-            <a:ext cx="11247120" cy="292608"/>
+            <a:ext cx="11247120" cy="502920"/>
           </a:xfrm>
           <a:prstGeom prst="rect">
             <a:avLst/>
@@ -5612,7 +5652,11 @@
           </a:bodyPr>
           <a:lstStyle/>
           <a:p>
-            <a:pPr algn="l"/>
+            <a:pPr algn="l">
+              <a:lnSpc>
+                <a:spcPct val="120000"/>
+              </a:lnSpc>
+            </a:pPr>
             <a:r>
               <a:rPr sz="1150" b="0" i="1">
                 <a:solidFill>
@@ -7475,7 +7519,7 @@
         <p:spPr>
           <a:xfrm>
             <a:off x="457200" y="1444752"/>
-            <a:ext cx="11247120" cy="292608"/>
+            <a:ext cx="11247120" cy="502920"/>
           </a:xfrm>
           <a:prstGeom prst="rect">
             <a:avLst/>
@@ -7488,7 +7532,11 @@
           </a:bodyPr>
           <a:lstStyle/>
           <a:p>
-            <a:pPr algn="l"/>
+            <a:pPr algn="l">
+              <a:lnSpc>
+                <a:spcPct val="120000"/>
+              </a:lnSpc>
+            </a:pPr>
             <a:r>
               <a:rPr sz="1150" b="0" i="1">
                 <a:solidFill>
@@ -9422,7 +9470,7 @@
         <p:spPr>
           <a:xfrm>
             <a:off x="457200" y="1444752"/>
-            <a:ext cx="11247120" cy="292608"/>
+            <a:ext cx="11247120" cy="502920"/>
           </a:xfrm>
           <a:prstGeom prst="rect">
             <a:avLst/>
@@ -9435,7 +9483,11 @@
           </a:bodyPr>
           <a:lstStyle/>
           <a:p>
-            <a:pPr algn="l"/>
+            <a:pPr algn="l">
+              <a:lnSpc>
+                <a:spcPct val="120000"/>
+              </a:lnSpc>
+            </a:pPr>
             <a:r>
               <a:rPr sz="1150" b="0" i="1">
                 <a:solidFill>
@@ -10900,7 +10952,7 @@
         <p:spPr>
           <a:xfrm>
             <a:off x="457200" y="1444752"/>
-            <a:ext cx="11247120" cy="292608"/>
+            <a:ext cx="11247120" cy="502920"/>
           </a:xfrm>
           <a:prstGeom prst="rect">
             <a:avLst/>
@@ -10913,7 +10965,11 @@
           </a:bodyPr>
           <a:lstStyle/>
           <a:p>
-            <a:pPr algn="l"/>
+            <a:pPr algn="l">
+              <a:lnSpc>
+                <a:spcPct val="120000"/>
+              </a:lnSpc>
+            </a:pPr>
             <a:r>
               <a:rPr sz="1150" b="0" i="1">
                 <a:solidFill>
@@ -12069,7 +12125,7 @@
         <p:spPr>
           <a:xfrm>
             <a:off x="457200" y="1444752"/>
-            <a:ext cx="11247120" cy="292608"/>
+            <a:ext cx="11247120" cy="502920"/>
           </a:xfrm>
           <a:prstGeom prst="rect">
             <a:avLst/>
@@ -12082,7 +12138,11 @@
           </a:bodyPr>
           <a:lstStyle/>
           <a:p>
-            <a:pPr algn="l"/>
+            <a:pPr algn="l">
+              <a:lnSpc>
+                <a:spcPct val="120000"/>
+              </a:lnSpc>
+            </a:pPr>
             <a:r>
               <a:rPr sz="1150" b="0" i="1">
                 <a:solidFill>
@@ -13292,7 +13352,7 @@
         <p:spPr>
           <a:xfrm>
             <a:off x="457200" y="1444752"/>
-            <a:ext cx="11247120" cy="292608"/>
+            <a:ext cx="11247120" cy="502920"/>
           </a:xfrm>
           <a:prstGeom prst="rect">
             <a:avLst/>
@@ -13305,7 +13365,11 @@
           </a:bodyPr>
           <a:lstStyle/>
           <a:p>
-            <a:pPr algn="l"/>
+            <a:pPr algn="l">
+              <a:lnSpc>
+                <a:spcPct val="120000"/>
+              </a:lnSpc>
+            </a:pPr>
             <a:r>
               <a:rPr sz="1150" b="0" i="1">
                 <a:solidFill>
@@ -13840,7 +13904,7 @@
         <p:spPr>
           <a:xfrm>
             <a:off x="457200" y="1444752"/>
-            <a:ext cx="11247120" cy="292608"/>
+            <a:ext cx="11247120" cy="502920"/>
           </a:xfrm>
           <a:prstGeom prst="rect">
             <a:avLst/>
@@ -13853,7 +13917,11 @@
           </a:bodyPr>
           <a:lstStyle/>
           <a:p>
-            <a:pPr algn="l"/>
+            <a:pPr algn="l">
+              <a:lnSpc>
+                <a:spcPct val="120000"/>
+              </a:lnSpc>
+            </a:pPr>
             <a:r>
               <a:rPr sz="1150" b="0" i="1">
                 <a:solidFill>
@@ -14694,7 +14762,7 @@
         </p:nvSpPr>
         <p:spPr>
           <a:xfrm>
-            <a:off x="457200" y="6089904"/>
+            <a:off x="457200" y="6071616"/>
             <a:ext cx="3759098" cy="365760"/>
           </a:xfrm>
           <a:prstGeom prst="rect">
@@ -14729,8 +14797,8 @@
         </p:nvSpPr>
         <p:spPr>
           <a:xfrm>
-            <a:off x="457200" y="6473952"/>
-            <a:ext cx="3759098" cy="292608"/>
+            <a:off x="548640" y="6455664"/>
+            <a:ext cx="3576218" cy="310896"/>
           </a:xfrm>
           <a:prstGeom prst="rect">
             <a:avLst/>
@@ -14745,7 +14813,7 @@
           <a:p>
             <a:pPr algn="ctr"/>
             <a:r>
-              <a:rPr sz="950" b="0" i="1">
+              <a:rPr sz="900" b="0" i="1">
                 <a:solidFill>
                   <a:srgbClr val="4A4A5E"/>
                 </a:solidFill>
@@ -14809,7 +14877,7 @@
         </p:nvSpPr>
         <p:spPr>
           <a:xfrm>
-            <a:off x="4216298" y="6089904"/>
+            <a:off x="4216298" y="6071616"/>
             <a:ext cx="3759098" cy="365760"/>
           </a:xfrm>
           <a:prstGeom prst="rect">
@@ -14844,8 +14912,8 @@
         </p:nvSpPr>
         <p:spPr>
           <a:xfrm>
-            <a:off x="4216298" y="6473952"/>
-            <a:ext cx="3759098" cy="292608"/>
+            <a:off x="4307738" y="6455664"/>
+            <a:ext cx="3576218" cy="310896"/>
           </a:xfrm>
           <a:prstGeom prst="rect">
             <a:avLst/>
@@ -14860,7 +14928,7 @@
           <a:p>
             <a:pPr algn="ctr"/>
             <a:r>
-              <a:rPr sz="950" b="0" i="1">
+              <a:rPr sz="900" b="0" i="1">
                 <a:solidFill>
                   <a:srgbClr val="4A4A5E"/>
                 </a:solidFill>
@@ -14924,7 +14992,7 @@
         </p:nvSpPr>
         <p:spPr>
           <a:xfrm>
-            <a:off x="7975396" y="6089904"/>
+            <a:off x="7975396" y="6071616"/>
             <a:ext cx="3759098" cy="365760"/>
           </a:xfrm>
           <a:prstGeom prst="rect">
@@ -14959,8 +15027,8 @@
         </p:nvSpPr>
         <p:spPr>
           <a:xfrm>
-            <a:off x="7975396" y="6473952"/>
-            <a:ext cx="3759098" cy="292608"/>
+            <a:off x="8066836" y="6455664"/>
+            <a:ext cx="3576218" cy="310896"/>
           </a:xfrm>
           <a:prstGeom prst="rect">
             <a:avLst/>
@@ -14975,7 +15043,7 @@
           <a:p>
             <a:pPr algn="ctr"/>
             <a:r>
-              <a:rPr sz="950" b="0" i="1">
+              <a:rPr sz="900" b="0" i="1">
                 <a:solidFill>
                   <a:srgbClr val="4A4A5E"/>
                 </a:solidFill>
@@ -15163,7 +15231,7 @@
         <p:spPr>
           <a:xfrm>
             <a:off x="457200" y="1444752"/>
-            <a:ext cx="11247120" cy="292608"/>
+            <a:ext cx="11247120" cy="502920"/>
           </a:xfrm>
           <a:prstGeom prst="rect">
             <a:avLst/>
@@ -15176,7 +15244,11 @@
           </a:bodyPr>
           <a:lstStyle/>
           <a:p>
-            <a:pPr algn="l"/>
+            <a:pPr algn="l">
+              <a:lnSpc>
+                <a:spcPct val="120000"/>
+              </a:lnSpc>
+            </a:pPr>
             <a:r>
               <a:rPr sz="1150" b="0" i="1">
                 <a:solidFill>
@@ -17395,7 +17467,7 @@
         <p:spPr>
           <a:xfrm>
             <a:off x="457200" y="1444752"/>
-            <a:ext cx="11247120" cy="292608"/>
+            <a:ext cx="11247120" cy="502920"/>
           </a:xfrm>
           <a:prstGeom prst="rect">
             <a:avLst/>
@@ -17408,7 +17480,11 @@
           </a:bodyPr>
           <a:lstStyle/>
           <a:p>
-            <a:pPr algn="l"/>
+            <a:pPr algn="l">
+              <a:lnSpc>
+                <a:spcPct val="120000"/>
+              </a:lnSpc>
+            </a:pPr>
             <a:r>
               <a:rPr sz="1150" b="0" i="1">
                 <a:solidFill>
@@ -19668,7 +19744,7 @@
         <p:spPr>
           <a:xfrm>
             <a:off x="457200" y="1444752"/>
-            <a:ext cx="11247120" cy="292608"/>
+            <a:ext cx="11247120" cy="502920"/>
           </a:xfrm>
           <a:prstGeom prst="rect">
             <a:avLst/>
@@ -19681,7 +19757,11 @@
           </a:bodyPr>
           <a:lstStyle/>
           <a:p>
-            <a:pPr algn="l"/>
+            <a:pPr algn="l">
+              <a:lnSpc>
+                <a:spcPct val="120000"/>
+              </a:lnSpc>
+            </a:pPr>
             <a:r>
               <a:rPr sz="1150" b="0" i="1">
                 <a:solidFill>
@@ -20515,7 +20595,7 @@
         <p:spPr>
           <a:xfrm>
             <a:off x="457200" y="1444752"/>
-            <a:ext cx="11247120" cy="292608"/>
+            <a:ext cx="11247120" cy="502920"/>
           </a:xfrm>
           <a:prstGeom prst="rect">
             <a:avLst/>
@@ -20528,7 +20608,11 @@
           </a:bodyPr>
           <a:lstStyle/>
           <a:p>
-            <a:pPr algn="l"/>
+            <a:pPr algn="l">
+              <a:lnSpc>
+                <a:spcPct val="120000"/>
+              </a:lnSpc>
+            </a:pPr>
             <a:r>
               <a:rPr sz="1150" b="0" i="1">
                 <a:solidFill>
